--- a/Vinage-Verhaal-Okhuysen.pptx
+++ b/Vinage-Verhaal-Okhuysen.pptx
@@ -2645,17 +2645,17 @@
               <a:buNone/>
             </a:pPr>
             <a:r>
-              <a:rPr lang="en-US" sz="5200" dirty="0">
-                <a:solidFill>
-                  <a:srgbClr val="000000"/>
-                </a:solidFill>
-                <a:latin typeface="Calibri" pitchFamily="34" charset="0"/>
-                <a:ea typeface="Calibri" pitchFamily="34" charset="-122"/>
-                <a:cs typeface="Calibri" pitchFamily="34" charset="-120"/>
-              </a:rPr>
-              <a:t>🍷</a:t>
-            </a:r>
-            <a:endParaRPr lang="en-US" sz="5200" dirty="0"/>
+              <a:rPr lang="en-US" sz="2200" b="1" dirty="0">
+                <a:solidFill>
+                  <a:srgbClr val="FFFFFF"/>
+                </a:solidFill>
+                <a:latin typeface="Georgia" pitchFamily="34" charset="0"/>
+                <a:ea typeface="Georgia" pitchFamily="34" charset="-122"/>
+                <a:cs typeface="Georgia" pitchFamily="34" charset="-120"/>
+              </a:rPr>
+              <a:t>WIJN</a:t>
+            </a:r>
+            <a:endParaRPr lang="en-US" sz="2200" dirty="0"/>
           </a:p>
         </p:txBody>
       </p:sp>
@@ -3215,17 +3215,17 @@
               <a:buNone/>
             </a:pPr>
             <a:r>
-              <a:rPr lang="en-US" sz="2200" dirty="0">
-                <a:solidFill>
-                  <a:srgbClr val="000000"/>
-                </a:solidFill>
-                <a:latin typeface="Calibri" pitchFamily="34" charset="0"/>
-                <a:ea typeface="Calibri" pitchFamily="34" charset="-122"/>
-                <a:cs typeface="Calibri" pitchFamily="34" charset="-120"/>
-              </a:rPr>
-              <a:t>📷</a:t>
-            </a:r>
-            <a:endParaRPr lang="en-US" sz="2200" dirty="0"/>
+              <a:rPr lang="en-US" sz="1300" b="1" dirty="0">
+                <a:solidFill>
+                  <a:srgbClr val="FFFFFF"/>
+                </a:solidFill>
+                <a:latin typeface="Georgia" pitchFamily="34" charset="0"/>
+                <a:ea typeface="Georgia" pitchFamily="34" charset="-122"/>
+                <a:cs typeface="Georgia" pitchFamily="34" charset="-120"/>
+              </a:rPr>
+              <a:t>SCAN</a:t>
+            </a:r>
+            <a:endParaRPr lang="en-US" sz="1300" dirty="0"/>
           </a:p>
         </p:txBody>
       </p:sp>
@@ -3389,17 +3389,17 @@
               <a:buNone/>
             </a:pPr>
             <a:r>
-              <a:rPr lang="en-US" sz="2200" dirty="0">
-                <a:solidFill>
-                  <a:srgbClr val="000000"/>
-                </a:solidFill>
-                <a:latin typeface="Calibri" pitchFamily="34" charset="0"/>
-                <a:ea typeface="Calibri" pitchFamily="34" charset="-122"/>
-                <a:cs typeface="Calibri" pitchFamily="34" charset="-120"/>
-              </a:rPr>
-              <a:t>🗂️</a:t>
-            </a:r>
-            <a:endParaRPr lang="en-US" sz="2200" dirty="0"/>
+              <a:rPr lang="en-US" sz="1300" b="1" dirty="0">
+                <a:solidFill>
+                  <a:srgbClr val="FFFFFF"/>
+                </a:solidFill>
+                <a:latin typeface="Georgia" pitchFamily="34" charset="0"/>
+                <a:ea typeface="Georgia" pitchFamily="34" charset="-122"/>
+                <a:cs typeface="Georgia" pitchFamily="34" charset="-120"/>
+              </a:rPr>
+              <a:t>CEL</a:t>
+            </a:r>
+            <a:endParaRPr lang="en-US" sz="1300" dirty="0"/>
           </a:p>
         </p:txBody>
       </p:sp>
@@ -3563,17 +3563,17 @@
               <a:buNone/>
             </a:pPr>
             <a:r>
-              <a:rPr lang="en-US" sz="2200" dirty="0">
-                <a:solidFill>
-                  <a:srgbClr val="000000"/>
-                </a:solidFill>
-                <a:latin typeface="Calibri" pitchFamily="34" charset="0"/>
-                <a:ea typeface="Calibri" pitchFamily="34" charset="-122"/>
-                <a:cs typeface="Calibri" pitchFamily="34" charset="-120"/>
-              </a:rPr>
-              <a:t>🍽️</a:t>
-            </a:r>
-            <a:endParaRPr lang="en-US" sz="2200" dirty="0"/>
+              <a:rPr lang="en-US" sz="1300" b="1" dirty="0">
+                <a:solidFill>
+                  <a:srgbClr val="FFFFFF"/>
+                </a:solidFill>
+                <a:latin typeface="Georgia" pitchFamily="34" charset="0"/>
+                <a:ea typeface="Georgia" pitchFamily="34" charset="-122"/>
+                <a:cs typeface="Georgia" pitchFamily="34" charset="-120"/>
+              </a:rPr>
+              <a:t>ETEN</a:t>
+            </a:r>
+            <a:endParaRPr lang="en-US" sz="1300" dirty="0"/>
           </a:p>
         </p:txBody>
       </p:sp>
@@ -3737,17 +3737,17 @@
               <a:buNone/>
             </a:pPr>
             <a:r>
-              <a:rPr lang="en-US" sz="2200" dirty="0">
-                <a:solidFill>
-                  <a:srgbClr val="000000"/>
-                </a:solidFill>
-                <a:latin typeface="Calibri" pitchFamily="34" charset="0"/>
-                <a:ea typeface="Calibri" pitchFamily="34" charset="-122"/>
-                <a:cs typeface="Calibri" pitchFamily="34" charset="-120"/>
-              </a:rPr>
-              <a:t>📊</a:t>
-            </a:r>
-            <a:endParaRPr lang="en-US" sz="2200" dirty="0"/>
+              <a:rPr lang="en-US" sz="1300" b="1" dirty="0">
+                <a:solidFill>
+                  <a:srgbClr val="FFFFFF"/>
+                </a:solidFill>
+                <a:latin typeface="Georgia" pitchFamily="34" charset="0"/>
+                <a:ea typeface="Georgia" pitchFamily="34" charset="-122"/>
+                <a:cs typeface="Georgia" pitchFamily="34" charset="-120"/>
+              </a:rPr>
+              <a:t>STAT</a:t>
+            </a:r>
+            <a:endParaRPr lang="en-US" sz="1300" dirty="0"/>
           </a:p>
         </p:txBody>
       </p:sp>
@@ -3985,7 +3985,7 @@
                 <a:ea typeface="Calibri" pitchFamily="34" charset="-122"/>
                 <a:cs typeface="Calibri" pitchFamily="34" charset="-120"/>
               </a:rPr>
-              <a:t>📷</a:t>
+              <a:t>SCAN</a:t>
             </a:r>
             <a:endParaRPr lang="en-US" sz="1400" dirty="0"/>
           </a:p>
@@ -4145,7 +4145,7 @@
                 <a:ea typeface="Calibri" pitchFamily="34" charset="-122"/>
                 <a:cs typeface="Calibri" pitchFamily="34" charset="-120"/>
               </a:rPr>
-              <a:t>🍇  Druivenras &amp; blend</a:t>
+              <a:t>Druivenras &amp; blend</a:t>
             </a:r>
             <a:endParaRPr lang="en-US" sz="1300" dirty="0"/>
           </a:p>
@@ -4209,7 +4209,7 @@
                 <a:ea typeface="Calibri" pitchFamily="34" charset="-122"/>
                 <a:cs typeface="Calibri" pitchFamily="34" charset="-120"/>
               </a:rPr>
-              <a:t>📍  Regio &amp; appellation</a:t>
+              <a:t>Regio &amp; appellation</a:t>
             </a:r>
             <a:endParaRPr lang="en-US" sz="1300" dirty="0"/>
           </a:p>
@@ -4273,7 +4273,7 @@
                 <a:ea typeface="Calibri" pitchFamily="34" charset="-122"/>
                 <a:cs typeface="Calibri" pitchFamily="34" charset="-120"/>
               </a:rPr>
-              <a:t>📅  Vintage &amp; drinkvenster</a:t>
+              <a:t>Vintage &amp; drinkvenster</a:t>
             </a:r>
             <a:endParaRPr lang="en-US" sz="1300" dirty="0"/>
           </a:p>
@@ -4337,7 +4337,7 @@
                 <a:ea typeface="Calibri" pitchFamily="34" charset="-122"/>
                 <a:cs typeface="Calibri" pitchFamily="34" charset="-120"/>
               </a:rPr>
-              <a:t>💰  Geschatte marktprijs</a:t>
+              <a:t>Geschatte marktprijs</a:t>
             </a:r>
             <a:endParaRPr lang="en-US" sz="1300" dirty="0"/>
           </a:p>
@@ -4401,7 +4401,7 @@
                 <a:ea typeface="Calibri" pitchFamily="34" charset="-122"/>
                 <a:cs typeface="Calibri" pitchFamily="34" charset="-120"/>
               </a:rPr>
-              <a:t>🍽️  Spijsadviezen</a:t>
+              <a:t>Spijsadviezen</a:t>
             </a:r>
             <a:endParaRPr lang="en-US" sz="1300" dirty="0"/>
           </a:p>
@@ -4465,7 +4465,7 @@
                 <a:ea typeface="Calibri" pitchFamily="34" charset="-122"/>
                 <a:cs typeface="Calibri" pitchFamily="34" charset="-120"/>
               </a:rPr>
-              <a:t>📝  Smaakbeschrijving</a:t>
+              <a:t>Smaakbeschrijving</a:t>
             </a:r>
             <a:endParaRPr lang="en-US" sz="1300" dirty="0"/>
           </a:p>
@@ -4631,15 +4631,15 @@
               <a:buNone/>
             </a:pPr>
             <a:r>
-              <a:rPr lang="en-US" sz="3600" dirty="0">
-                <a:solidFill>
-                  <a:srgbClr val="000000"/>
-                </a:solidFill>
-                <a:latin typeface="Calibri" pitchFamily="34" charset="0"/>
-                <a:ea typeface="Calibri" pitchFamily="34" charset="-122"/>
-                <a:cs typeface="Calibri" pitchFamily="34" charset="-120"/>
-              </a:rPr>
-              <a:t>👤</a:t>
+              <a:rPr lang="en-US" sz="3600" b="1" dirty="0">
+                <a:solidFill>
+                  <a:srgbClr val="FFFFFF"/>
+                </a:solidFill>
+                <a:latin typeface="Georgia" pitchFamily="34" charset="0"/>
+                <a:ea typeface="Georgia" pitchFamily="34" charset="-122"/>
+                <a:cs typeface="Georgia" pitchFamily="34" charset="-120"/>
+              </a:rPr>
+              <a:t>A</a:t>
             </a:r>
             <a:endParaRPr lang="en-US" sz="3600" dirty="0"/>
           </a:p>
@@ -4695,15 +4695,15 @@
               <a:buNone/>
             </a:pPr>
             <a:r>
-              <a:rPr lang="en-US" sz="3600" dirty="0">
-                <a:solidFill>
-                  <a:srgbClr val="000000"/>
-                </a:solidFill>
-                <a:latin typeface="Calibri" pitchFamily="34" charset="0"/>
-                <a:ea typeface="Calibri" pitchFamily="34" charset="-122"/>
-                <a:cs typeface="Calibri" pitchFamily="34" charset="-120"/>
-              </a:rPr>
-              <a:t>👤</a:t>
+              <a:rPr lang="en-US" sz="3600" b="1" dirty="0">
+                <a:solidFill>
+                  <a:srgbClr val="FFFFFF"/>
+                </a:solidFill>
+                <a:latin typeface="Georgia" pitchFamily="34" charset="0"/>
+                <a:ea typeface="Georgia" pitchFamily="34" charset="-122"/>
+                <a:cs typeface="Georgia" pitchFamily="34" charset="-120"/>
+              </a:rPr>
+              <a:t>B</a:t>
             </a:r>
             <a:endParaRPr lang="en-US" sz="3600" dirty="0"/>
           </a:p>
@@ -4759,7 +4759,7 @@
               <a:buNone/>
             </a:pPr>
             <a:r>
-              <a:rPr lang="en-US" sz="2000" dirty="0">
+              <a:rPr lang="en-US" sz="1400" dirty="0">
                 <a:solidFill>
                   <a:srgbClr val="A26769"/>
                 </a:solidFill>
@@ -4767,9 +4767,9 @@
                 <a:ea typeface="Calibri" pitchFamily="34" charset="-122"/>
                 <a:cs typeface="Calibri" pitchFamily="34" charset="-120"/>
               </a:rPr>
-              <a:t>↔</a:t>
-            </a:r>
-            <a:endParaRPr lang="en-US" sz="2000" dirty="0"/>
+              <a:t>&lt; &gt;</a:t>
+            </a:r>
+            <a:endParaRPr lang="en-US" sz="1400" dirty="0"/>
           </a:p>
         </p:txBody>
       </p:sp>
